--- a/dist/초1/철학·논리·심리·교육·종교/질문과이유/초1_철학·논리·심리·교육·종교_질문과이유_01_질문하고이유말하기_학생용.pptx
+++ b/dist/초1/철학·논리·심리·교육·종교/질문과이유/초1_철학·논리·심리·교육·종교_질문과이유_01_질문하고이유말하기_학생용.pptx
@@ -118,44 +118,44 @@
   <p:extLst>
     <p:ext uri="{521415D9-36F7-43E2-AB2F-B90AF26B5E84}">
       <p14:sectionLst xmlns:p14="http://schemas.microsoft.com/office/powerpoint/2010/main">
-        <p14:section name="도입" id="{3c8a9671-5827-194a-9d53-6e9077ec49e5}">
+        <p14:section name="도입" id="{290ad58a-8a40-e9a6-8f3b-5b4d37b42e42}">
           <p14:sldIdLst>
             <p14:sldId id="256"/>
             <p14:sldId id="257"/>
           </p14:sldIdLst>
         </p14:section>
-        <p14:section name="개념" id="{046357b5-11f8-1fbc-6ec5-cb9083f4744f}">
+        <p14:section name="개념" id="{44c3cece-3a09-35a0-e243-225dd05f2290}">
           <p14:sldIdLst>
             <p14:sldId id="258"/>
             <p14:sldId id="259"/>
             <p14:sldId id="261"/>
           </p14:sldIdLst>
         </p14:section>
-        <p14:section name="연습" id="{41d16b92-dd0b-b79a-450d-ef951133d99b}">
+        <p14:section name="연습" id="{eaaa525e-c898-2352-718f-3f421a439b52}">
           <p14:sldIdLst>
             <p14:sldId id="260"/>
             <p14:sldId id="262"/>
             <p14:sldId id="263"/>
           </p14:sldIdLst>
         </p14:section>
-        <p14:section name="개념" id="{0987b343-43dd-9114-156e-4ee56ee545ac}">
+        <p14:section name="개념" id="{1782d211-c9e6-b9fd-db68-191e7572747b}">
           <p14:sldIdLst/>
         </p14:section>
-        <p14:section name="연습" id="{95531973-a56f-e596-bd49-10eca1a8feaa}">
+        <p14:section name="연습" id="{bf2831ee-75e0-2d14-ad1b-cddbad29835a}">
           <p14:sldIdLst/>
         </p14:section>
-        <p14:section name="확인" id="{f2f9849f-46e2-fb13-6276-9abf0afaecfc}">
+        <p14:section name="확인" id="{c9e07bdb-a2b9-1a73-95a9-75344944953f}">
           <p14:sldIdLst>
             <p14:sldId id="264"/>
             <p14:sldId id="265"/>
           </p14:sldIdLst>
         </p14:section>
-        <p14:section name="정리" id="{3e28ca79-b0a1-5bc7-c522-9c6863260efe}">
+        <p14:section name="정리" id="{062d95be-f763-18f1-f564-5ce4764d713c}">
           <p14:sldIdLst>
             <p14:sldId id="266"/>
           </p14:sldIdLst>
         </p14:section>
-        <p14:section name="보충" id="{3a6d7c3f-c041-7821-3ff5-d804cae4e1f7}">
+        <p14:section name="보충" id="{d07d5514-25c5-7637-ddd8-0de8e45baf64}">
           <p14:sldIdLst>
             <p14:sldId id="267"/>
           </p14:sldIdLst>
